--- a/Cisco Packet Tracer.pptx
+++ b/Cisco Packet Tracer.pptx
@@ -264,7 +264,7 @@
           <a:p>
             <a:fld id="{B50C56B9-18AE-4AAD-98D9-DE99AA26451C}" type="datetimeFigureOut">
               <a:rPr lang="de-DE" smtClean="0"/>
-              <a:t>22.05.2024</a:t>
+              <a:t>17.10.2025</a:t>
             </a:fld>
             <a:endParaRPr lang="de-DE"/>
           </a:p>
@@ -462,7 +462,7 @@
           <a:p>
             <a:fld id="{B50C56B9-18AE-4AAD-98D9-DE99AA26451C}" type="datetimeFigureOut">
               <a:rPr lang="de-DE" smtClean="0"/>
-              <a:t>22.05.2024</a:t>
+              <a:t>17.10.2025</a:t>
             </a:fld>
             <a:endParaRPr lang="de-DE"/>
           </a:p>
@@ -670,7 +670,7 @@
           <a:p>
             <a:fld id="{B50C56B9-18AE-4AAD-98D9-DE99AA26451C}" type="datetimeFigureOut">
               <a:rPr lang="de-DE" smtClean="0"/>
-              <a:t>22.05.2024</a:t>
+              <a:t>17.10.2025</a:t>
             </a:fld>
             <a:endParaRPr lang="de-DE"/>
           </a:p>
@@ -876,7 +876,7 @@
           <a:p>
             <a:fld id="{B50C56B9-18AE-4AAD-98D9-DE99AA26451C}" type="datetimeFigureOut">
               <a:rPr lang="de-DE" smtClean="0"/>
-              <a:t>22.05.2024</a:t>
+              <a:t>17.10.2025</a:t>
             </a:fld>
             <a:endParaRPr lang="de-DE"/>
           </a:p>
@@ -1151,7 +1151,7 @@
           <a:p>
             <a:fld id="{B50C56B9-18AE-4AAD-98D9-DE99AA26451C}" type="datetimeFigureOut">
               <a:rPr lang="de-DE" smtClean="0"/>
-              <a:t>22.05.2024</a:t>
+              <a:t>17.10.2025</a:t>
             </a:fld>
             <a:endParaRPr lang="de-DE"/>
           </a:p>
@@ -1416,7 +1416,7 @@
           <a:p>
             <a:fld id="{B50C56B9-18AE-4AAD-98D9-DE99AA26451C}" type="datetimeFigureOut">
               <a:rPr lang="de-DE" smtClean="0"/>
-              <a:t>22.05.2024</a:t>
+              <a:t>17.10.2025</a:t>
             </a:fld>
             <a:endParaRPr lang="de-DE"/>
           </a:p>
@@ -1828,7 +1828,7 @@
           <a:p>
             <a:fld id="{B50C56B9-18AE-4AAD-98D9-DE99AA26451C}" type="datetimeFigureOut">
               <a:rPr lang="de-DE" smtClean="0"/>
-              <a:t>22.05.2024</a:t>
+              <a:t>17.10.2025</a:t>
             </a:fld>
             <a:endParaRPr lang="de-DE"/>
           </a:p>
@@ -1969,7 +1969,7 @@
           <a:p>
             <a:fld id="{B50C56B9-18AE-4AAD-98D9-DE99AA26451C}" type="datetimeFigureOut">
               <a:rPr lang="de-DE" smtClean="0"/>
-              <a:t>22.05.2024</a:t>
+              <a:t>17.10.2025</a:t>
             </a:fld>
             <a:endParaRPr lang="de-DE"/>
           </a:p>
@@ -2082,7 +2082,7 @@
           <a:p>
             <a:fld id="{B50C56B9-18AE-4AAD-98D9-DE99AA26451C}" type="datetimeFigureOut">
               <a:rPr lang="de-DE" smtClean="0"/>
-              <a:t>22.05.2024</a:t>
+              <a:t>17.10.2025</a:t>
             </a:fld>
             <a:endParaRPr lang="de-DE"/>
           </a:p>
@@ -2393,7 +2393,7 @@
           <a:p>
             <a:fld id="{B50C56B9-18AE-4AAD-98D9-DE99AA26451C}" type="datetimeFigureOut">
               <a:rPr lang="de-DE" smtClean="0"/>
-              <a:t>22.05.2024</a:t>
+              <a:t>17.10.2025</a:t>
             </a:fld>
             <a:endParaRPr lang="de-DE"/>
           </a:p>
@@ -2681,7 +2681,7 @@
           <a:p>
             <a:fld id="{B50C56B9-18AE-4AAD-98D9-DE99AA26451C}" type="datetimeFigureOut">
               <a:rPr lang="de-DE" smtClean="0"/>
-              <a:t>22.05.2024</a:t>
+              <a:t>17.10.2025</a:t>
             </a:fld>
             <a:endParaRPr lang="de-DE"/>
           </a:p>
@@ -2923,7 +2923,7 @@
           <a:p>
             <a:fld id="{B50C56B9-18AE-4AAD-98D9-DE99AA26451C}" type="datetimeFigureOut">
               <a:rPr lang="de-DE" smtClean="0"/>
-              <a:t>22.05.2024</a:t>
+              <a:t>17.10.2025</a:t>
             </a:fld>
             <a:endParaRPr lang="de-DE"/>
           </a:p>
@@ -5767,12 +5767,14 @@
         </p:nvSpPr>
         <p:spPr/>
         <p:txBody>
-          <a:bodyPr/>
+          <a:bodyPr>
+            <a:normAutofit lnSpcReduction="10000"/>
+          </a:bodyPr>
           <a:lstStyle/>
           <a:p>
             <a:r>
               <a:rPr lang="de-DE" dirty="0"/>
-              <a:t>Im Packet-Tracer lassen sich die meisten Cisco-Switche und Router mit Schnittstellenkarten erweitern (Reiter „</a:t>
+              <a:t>Im Packet-Tracer lassen sich die meisten Cisco-Switche und Router, aber auch PC und Server mit Schnittstellenkarten erweitern (Reiter „</a:t>
             </a:r>
             <a:r>
               <a:rPr lang="de-DE" dirty="0" err="1"/>
@@ -5883,8 +5885,8 @@
         </p:blipFill>
         <p:spPr>
           <a:xfrm>
-            <a:off x="10323446" y="3954026"/>
-            <a:ext cx="1318374" cy="365792"/>
+            <a:off x="10323445" y="3954025"/>
+            <a:ext cx="1677835" cy="465527"/>
           </a:xfrm>
           <a:prstGeom prst="rect">
             <a:avLst/>
@@ -5914,7 +5916,7 @@
         <p:spPr>
           <a:xfrm>
             <a:off x="8278336" y="4346560"/>
-            <a:ext cx="403347" cy="305235"/>
+            <a:ext cx="570696" cy="431877"/>
           </a:xfrm>
           <a:prstGeom prst="rect">
             <a:avLst/>
@@ -5944,7 +5946,7 @@
         <p:spPr>
           <a:xfrm>
             <a:off x="10323446" y="4697360"/>
-            <a:ext cx="1303133" cy="358171"/>
+            <a:ext cx="1693730" cy="465528"/>
           </a:xfrm>
           <a:prstGeom prst="rect">
             <a:avLst/>
@@ -5973,8 +5975,8 @@
         </p:blipFill>
         <p:spPr>
           <a:xfrm>
-            <a:off x="9232224" y="5162888"/>
-            <a:ext cx="472481" cy="701101"/>
+            <a:off x="10323445" y="5220792"/>
+            <a:ext cx="1030355" cy="1528914"/>
           </a:xfrm>
           <a:prstGeom prst="rect">
             <a:avLst/>
@@ -6003,7 +6005,7 @@
         </p:blipFill>
         <p:spPr>
           <a:xfrm>
-            <a:off x="10323446" y="2650572"/>
+            <a:off x="10323446" y="2832594"/>
             <a:ext cx="1539373" cy="548688"/>
           </a:xfrm>
           <a:prstGeom prst="rect">
